--- a/presentations/Cisco_India_Report_Altera_Account_Plan.pptx
+++ b/presentations/Cisco_India_Report_Altera_Account_Plan.pptx
@@ -4390,7 +4390,7 @@
                 <a:ea typeface="Liberation Sans"/>
                 <a:cs typeface="Liberation Sans"/>
               </a:rPr>
-              <a:t>SWOT Analysis — India Region</a:t>
+              <a:t>SWOT Analysis — Cisco View about Altera</a:t>
             </a:r>
           </a:p>
         </p:txBody>
@@ -8300,7 +8300,7 @@
                 <a:ea typeface="Liberation Sans"/>
                 <a:cs typeface="Liberation Sans"/>
               </a:rPr>
-              <a:t>SWOT Analysis — India Region (Altera View)</a:t>
+              <a:t>SWOT Analysis — Cisco View about Altera</a:t>
             </a:r>
           </a:p>
         </p:txBody>
@@ -8335,7 +8335,7 @@
                 <a:ea typeface="Liberation Sans"/>
                 <a:cs typeface="Liberation Sans"/>
               </a:rPr>
-              <a:t>Control-plane / SP design activity · Bengaluru</a:t>
+              <a:t>How Bengaluru SP / control-plane engineering evaluates Altera vs AMD, Lattice, Microchip</a:t>
             </a:r>
           </a:p>
         </p:txBody>
@@ -8499,7 +8499,7 @@
                 <a:ea typeface="Liberation Sans"/>
                 <a:cs typeface="Liberation Sans"/>
               </a:rPr>
-              <a:t>30+ FPGA eng in Bengaluru owning SP routers, ASR/8000 control path, optical (w/ Italy)</a:t>
+              <a:t>Agilex fabric power and performance; leadership IP, turnkey solutions, P4 architectures</a:t>
             </a:r>
           </a:p>
           <a:p>
@@ -8519,7 +8519,7 @@
                 <a:ea typeface="Liberation Sans"/>
                 <a:cs typeface="Liberation Sans"/>
               </a:rPr>
-              <a:t>Friendly exec relationship with Vijay Pramod; CAB + training delivered (2025)</a:t>
+              <a:t>High-performance AI/ML (Tensor block); Agilex 5/3 features aligned for control path &amp; BMC</a:t>
             </a:r>
           </a:p>
           <a:p>
@@ -8539,7 +8539,7 @@
                 <a:ea typeface="Liberation Sans"/>
                 <a:cs typeface="Liberation Sans"/>
               </a:rPr>
-              <a:t>Live traction: ASR1k TM on Agilex 7 M; AI/ML tensor story for control/BMC</a:t>
+              <a:t>Strong local Bengaluru FAE support (TM 240 MHz timing, MCDMA patches, APS responsiveness)</a:t>
             </a:r>
           </a:p>
           <a:p>
@@ -8559,7 +8559,7 @@
                 <a:ea typeface="Liberation Sans"/>
                 <a:cs typeface="Liberation Sans"/>
               </a:rPr>
-              <a:t>PQC / secure-boot roadmap vs Microchip security incumbency</a:t>
+              <a:t>Cisco-specific Secure Boot on MAX10; PQC / SEU roadmap credible for next platforms</a:t>
             </a:r>
           </a:p>
         </p:txBody>
@@ -8723,7 +8723,7 @@
                 <a:ea typeface="Liberation Sans"/>
                 <a:cs typeface="Liberation Sans"/>
               </a:rPr>
-              <a:t>Xilinx Artix incumbency on control paths; SmartFusion2 for security</a:t>
+              <a:t>Uncompetitive at very low end (need ~$8 secure device); PolarFire / Lattice win those sockets</a:t>
             </a:r>
           </a:p>
           <a:p>
@@ -8743,7 +8743,7 @@
                 <a:ea typeface="Liberation Sans"/>
                 <a:cs typeface="Liberation Sans"/>
               </a:rPr>
-              <a:t>Existing stacks ported to Xilinx / Microchip — high switching cost</a:t>
+              <a:t>Agilex 5 ~40% above Lattice on India RFQs (130K–200K LE); Agilex 3 cost still too high</a:t>
             </a:r>
           </a:p>
           <a:p>
@@ -8763,7 +8763,7 @@
                 <a:ea typeface="Liberation Sans"/>
                 <a:cs typeface="Liberation Sans"/>
               </a:rPr>
-              <a:t>Agilex 5 price gap (~40% vs Lattice); weak below ~$8–$20 vs PolarFire/Lattice</a:t>
+              <a:t>No DDR5 planned on Agilex 7; lower on-chip memory ratio and crypto SIP/HIP vs Versal</a:t>
             </a:r>
           </a:p>
           <a:p>
@@ -8783,7 +8783,7 @@
                 <a:ea typeface="Liberation Sans"/>
                 <a:cs typeface="Liberation Sans"/>
               </a:rPr>
-              <a:t>Thin coverage: 5% FSE / 10% FAE Cisco FTE vs rising support load</a:t>
+              <a:t>Migration friction from Artix / SmartFusion2 codebases — tools &amp; SW maturity under scrutiny</a:t>
             </a:r>
           </a:p>
         </p:txBody>
@@ -8947,7 +8947,7 @@
                 <a:ea typeface="Liberation Sans"/>
                 <a:cs typeface="Liberation Sans"/>
               </a:rPr>
-              <a:t>Control-plane sockets on 8000 / ASR from Bangalore; Agilex 5/3 + MAX 10 attach</a:t>
+              <a:t>Displace Xilinx Artix &amp; Microchip SF2 on control plane with Agilex 5 + PQC secure boot</a:t>
             </a:r>
           </a:p>
           <a:p>
@@ -8967,7 +8967,7 @@
                 <a:ea typeface="Liberation Sans"/>
                 <a:cs typeface="Liberation Sans"/>
               </a:rPr>
-              <a:t>Lavena returning to Agilex 7 after AMD timing issues; TM DWIN + Berkeley ramp</a:t>
+              <a:t>ASR1k Traffic Manager / Lavena Agilex 7 design wins; MAX10 BMC and platform attach</a:t>
             </a:r>
           </a:p>
           <a:p>
@@ -8987,7 +8987,7 @@
                 <a:ea typeface="Liberation Sans"/>
                 <a:cs typeface="Liberation Sans"/>
               </a:rPr>
-              <a:t>PQC, SEU, AI/ML telemetry demos already in motion with India eng</a:t>
+              <a:t>AI/ML telemetry, ASSP/ASIC replacement, and optical fabric attach (India + Italy)</a:t>
             </a:r>
           </a:p>
           <a:p>
@@ -9007,7 +9007,7 @@
                 <a:ea typeface="Liberation Sans"/>
                 <a:cs typeface="Liberation Sans"/>
               </a:rPr>
-              <a:t>Cisco manufacturing investment in India; Marco Croci push for India → Altera</a:t>
+              <a:t>Refresh M10 / low-cost glue leveraging Agilex strengths where Lattice is mid-range only</a:t>
             </a:r>
           </a:p>
         </p:txBody>
@@ -9171,7 +9171,7 @@
                 <a:ea typeface="Liberation Sans"/>
                 <a:cs typeface="Liberation Sans"/>
               </a:rPr>
-              <a:t>AMD Versal; Lattice mid-range; PolarFire security lock-in on CAT8k-class</a:t>
+              <a:t>AMD Versal 2 with better HIP; HBM3 roadmap for security/NT; 224G transmission path</a:t>
             </a:r>
           </a:p>
           <a:p>
@@ -9191,7 +9191,7 @@
                 <a:ea typeface="Liberation Sans"/>
                 <a:cs typeface="Liberation Sans"/>
               </a:rPr>
-              <a:t>Datapath → Silicon One / ASICs — FPGA TAM concentrates on control/glue</a:t>
+              <a:t>Lattice entering mid-range (incl. HP XCVRs); PolarFire security lock-in on CAT8k-class</a:t>
             </a:r>
           </a:p>
           <a:p>
@@ -9211,7 +9211,7 @@
                 <a:ea typeface="Liberation Sans"/>
                 <a:cs typeface="Liberation Sans"/>
               </a:rPr>
-              <a:t>RFQ pricing losses; low-end secure ~$8 device request closed (no product)</a:t>
+              <a:t>Virtualization / SW startups reduce FPGA content; Silicon One absorbs datapath value</a:t>
             </a:r>
           </a:p>
           <a:p>
@@ -9231,7 +9231,7 @@
                 <a:ea typeface="Liberation Sans"/>
                 <a:cs typeface="Liberation Sans"/>
               </a:rPr>
-              <a:t>Geopolitical / indigenous-FPGA pressure; WW inventory diverting focus</a:t>
+              <a:t>Geopolitical / indigenous-FPGA pressure; LPDDR4 EOL cycle creates redesign risk</a:t>
             </a:r>
           </a:p>
         </p:txBody>
